--- a/dist/초4/국어/토의와쓰기/초4_국어_토의와쓰기_01_의견과이유_학생용.pptx
+++ b/dist/초4/국어/토의와쓰기/초4_국어_토의와쓰기_01_의견과이유_학생용.pptx
@@ -120,13 +120,13 @@
   <p:extLst>
     <p:ext uri="{521415D9-36F7-43E2-AB2F-B90AF26B5E84}">
       <p14:sectionLst xmlns:p14="http://schemas.microsoft.com/office/powerpoint/2010/main">
-        <p14:section name="도입" id="{50de3e74-af13-ebf9-c295-48ed59cd5f76}">
+        <p14:section name="도입" id="{8436b2b6-fab5-db28-ada4-b03371be1179}">
           <p14:sldIdLst>
             <p14:sldId id="256"/>
             <p14:sldId id="257"/>
           </p14:sldIdLst>
         </p14:section>
-        <p14:section name="개념" id="{ba0eebbd-21c6-17b8-1e5f-d57bae88889b}">
+        <p14:section name="개념" id="{c2e1b6aa-ca05-e52a-d902-24193e2ec52d}">
           <p14:sldIdLst>
             <p14:sldId id="258"/>
             <p14:sldId id="259"/>
@@ -135,25 +135,25 @@
             <p14:sldId id="262"/>
           </p14:sldIdLst>
         </p14:section>
-        <p14:section name="연습" id="{5d3bffca-7f21-6e79-c0ab-4e9248e95137}">
+        <p14:section name="연습" id="{959a5a61-9454-ed17-b100-a7fe5d5869b7}">
           <p14:sldIdLst>
             <p14:sldId id="263"/>
             <p14:sldId id="264"/>
             <p14:sldId id="265"/>
           </p14:sldIdLst>
         </p14:section>
-        <p14:section name="확인" id="{5296aad0-d031-7206-6ead-3d7b6fa9481c}">
+        <p14:section name="확인" id="{95d15bdd-a1b2-e786-7974-a9395894cba9}">
           <p14:sldIdLst>
             <p14:sldId id="266"/>
             <p14:sldId id="267"/>
           </p14:sldIdLst>
         </p14:section>
-        <p14:section name="정리" id="{550f6d17-9b04-b38b-e1a0-7992f26eb698}">
+        <p14:section name="정리" id="{4bee0f7b-640d-7c6a-4c70-ee13ccfea674}">
           <p14:sldIdLst>
             <p14:sldId id="268"/>
           </p14:sldIdLst>
         </p14:section>
-        <p14:section name="보충" id="{2ea05ed8-9cfc-d546-965f-9b61f702d4f6}">
+        <p14:section name="보충" id="{f7dd8ba0-608c-cc2a-2642-7c057780a9f0}">
           <p14:sldIdLst>
             <p14:sldId id="269"/>
           </p14:sldIdLst>
@@ -4470,7 +4470,7 @@
               <a:buNone/>
             </a:pPr>
             <a:r>
-              <a:rPr lang="ko-KR" altLang="en-US" sz="2200" b="1" dirty="0">
+              <a:rPr lang="ko-KR" altLang="en-US" sz="2400" b="1" dirty="0">
                 <a:solidFill>
                   <a:srgbClr val="FFFFFF"/>
                 </a:solidFill>
@@ -4478,9 +4478,9 @@
                 <a:ea typeface="맑은 고딕" pitchFamily="34" charset="-122"/>
                 <a:cs typeface="맑은 고딕" pitchFamily="34" charset="-120"/>
               </a:rPr>
-              <a:t>○ ‘왜냐하면 ~ 때문이에요’로 이유 들기</a:t>
-            </a:r>
-            <a:endParaRPr lang="ko-KR" sz="2200" dirty="0"/>
+              <a:t>○ 알맞은 이유 두 가지 들기</a:t>
+            </a:r>
+            <a:endParaRPr lang="ko-KR" sz="2400" dirty="0"/>
           </a:p>
         </p:txBody>
       </p:sp>
@@ -4525,7 +4525,7 @@
                 <a:ea typeface="맑은 고딕" pitchFamily="34" charset="-122"/>
                 <a:cs typeface="맑은 고딕" pitchFamily="34" charset="-120"/>
               </a:rPr>
-              <a:t>× ‘그냥’, 되풀이로 이유 대기</a:t>
+              <a:t>× ‘그냥’으로 이유 대신하기</a:t>
             </a:r>
             <a:endParaRPr lang="ko-KR" sz="2400" dirty="0"/>
           </a:p>

--- a/dist/초4/국어/토의와쓰기/초4_국어_토의와쓰기_01_의견과이유_학생용.pptx
+++ b/dist/초4/국어/토의와쓰기/초4_국어_토의와쓰기_01_의견과이유_학생용.pptx
@@ -120,13 +120,13 @@
   <p:extLst>
     <p:ext uri="{521415D9-36F7-43E2-AB2F-B90AF26B5E84}">
       <p14:sectionLst xmlns:p14="http://schemas.microsoft.com/office/powerpoint/2010/main">
-        <p14:section name="도입" id="{8436b2b6-fab5-db28-ada4-b03371be1179}">
+        <p14:section name="도입" id="{ceafa87c-3694-f9f3-e7c8-6cc9f17567ae}">
           <p14:sldIdLst>
             <p14:sldId id="256"/>
             <p14:sldId id="257"/>
           </p14:sldIdLst>
         </p14:section>
-        <p14:section name="개념" id="{c2e1b6aa-ca05-e52a-d902-24193e2ec52d}">
+        <p14:section name="개념" id="{9d5b3122-07ec-9812-d365-96d213e79894}">
           <p14:sldIdLst>
             <p14:sldId id="258"/>
             <p14:sldId id="259"/>
@@ -135,25 +135,25 @@
             <p14:sldId id="262"/>
           </p14:sldIdLst>
         </p14:section>
-        <p14:section name="연습" id="{959a5a61-9454-ed17-b100-a7fe5d5869b7}">
+        <p14:section name="연습" id="{9144ec76-9c84-a3a2-4a9c-284a99f3a8ee}">
           <p14:sldIdLst>
             <p14:sldId id="263"/>
             <p14:sldId id="264"/>
             <p14:sldId id="265"/>
           </p14:sldIdLst>
         </p14:section>
-        <p14:section name="확인" id="{95d15bdd-a1b2-e786-7974-a9395894cba9}">
+        <p14:section name="확인" id="{7e649b42-7f5c-2ac4-da75-602fc457138c}">
           <p14:sldIdLst>
             <p14:sldId id="266"/>
             <p14:sldId id="267"/>
           </p14:sldIdLst>
         </p14:section>
-        <p14:section name="정리" id="{4bee0f7b-640d-7c6a-4c70-ee13ccfea674}">
+        <p14:section name="정리" id="{2787c401-af17-f233-3dd3-1d49aca5ed38}">
           <p14:sldIdLst>
             <p14:sldId id="268"/>
           </p14:sldIdLst>
         </p14:section>
-        <p14:section name="보충" id="{f7dd8ba0-608c-cc2a-2642-7c057780a9f0}">
+        <p14:section name="보충" id="{7d7fba35-d09c-8db6-35ce-56d41a56a734}">
           <p14:sldIdLst>
             <p14:sldId id="269"/>
           </p14:sldIdLst>
@@ -6590,7 +6590,7 @@
           </p:nvPr>
         </p:nvGraphicFramePr>
         <p:xfrm>
-          <a:off x="1065276" y="2260473"/>
+          <a:off x="1065276" y="2259330"/>
           <a:ext cx="10058400" cy="914400"/>
         </p:xfrm>
         <a:graphic>
@@ -6601,7 +6601,7 @@
                 <a:gridCol w="1810512"/>
                 <a:gridCol w="8247888"/>
               </a:tblGrid>
-              <a:tr h="511810">
+              <a:tr h="512572">
                 <a:tc>
                   <a:txBody>
                     <a:bodyPr/>
@@ -6739,7 +6739,7 @@
                   </a:tcPr>
                 </a:tc>
               </a:tr>
-              <a:tr h="511810">
+              <a:tr h="512572">
                 <a:tc>
                   <a:txBody>
                     <a:bodyPr/>
@@ -6877,7 +6877,7 @@
                   </a:tcPr>
                 </a:tc>
               </a:tr>
-              <a:tr h="511810">
+              <a:tr h="512572">
                 <a:tc>
                   <a:txBody>
                     <a:bodyPr/>

--- a/dist/초4/국어/토의와쓰기/초4_국어_토의와쓰기_01_의견과이유_학생용.pptx
+++ b/dist/초4/국어/토의와쓰기/초4_국어_토의와쓰기_01_의견과이유_학생용.pptx
@@ -120,13 +120,13 @@
   <p:extLst>
     <p:ext uri="{521415D9-36F7-43E2-AB2F-B90AF26B5E84}">
       <p14:sectionLst xmlns:p14="http://schemas.microsoft.com/office/powerpoint/2010/main">
-        <p14:section name="도입" id="{ceafa87c-3694-f9f3-e7c8-6cc9f17567ae}">
+        <p14:section name="도입" id="{b8d5e888-29fd-d205-9a25-a196a1f5423a}">
           <p14:sldIdLst>
             <p14:sldId id="256"/>
             <p14:sldId id="257"/>
           </p14:sldIdLst>
         </p14:section>
-        <p14:section name="개념" id="{9d5b3122-07ec-9812-d365-96d213e79894}">
+        <p14:section name="개념" id="{7fab2a34-7dfe-4207-581a-72785bd7fe33}">
           <p14:sldIdLst>
             <p14:sldId id="258"/>
             <p14:sldId id="259"/>
@@ -135,25 +135,25 @@
             <p14:sldId id="262"/>
           </p14:sldIdLst>
         </p14:section>
-        <p14:section name="연습" id="{9144ec76-9c84-a3a2-4a9c-284a99f3a8ee}">
+        <p14:section name="연습" id="{6e9ada6d-339e-80a4-5884-f353e932e1d9}">
           <p14:sldIdLst>
             <p14:sldId id="263"/>
             <p14:sldId id="264"/>
             <p14:sldId id="265"/>
           </p14:sldIdLst>
         </p14:section>
-        <p14:section name="확인" id="{7e649b42-7f5c-2ac4-da75-602fc457138c}">
+        <p14:section name="확인" id="{67ac7e9a-0acd-de5e-6ee6-064081d59625}">
           <p14:sldIdLst>
             <p14:sldId id="266"/>
             <p14:sldId id="267"/>
           </p14:sldIdLst>
         </p14:section>
-        <p14:section name="정리" id="{2787c401-af17-f233-3dd3-1d49aca5ed38}">
+        <p14:section name="정리" id="{6466404d-05ee-4dd3-8e6d-e10d7931a189}">
           <p14:sldIdLst>
             <p14:sldId id="268"/>
           </p14:sldIdLst>
         </p14:section>
-        <p14:section name="보충" id="{7d7fba35-d09c-8db6-35ce-56d41a56a734}">
+        <p14:section name="보충" id="{3f9f0fc1-722d-7c5e-1f39-268db36f148e}">
           <p14:sldIdLst>
             <p14:sldId id="269"/>
           </p14:sldIdLst>
